--- a/resources/presentations/Lunch-Is-Packed-Module-04-tools-materials-and-safety.pptx
+++ b/resources/presentations/Lunch-Is-Packed-Module-04-tools-materials-and-safety.pptx
@@ -2,20 +2,20 @@
 <file path=ppt/presentation.xml><?xml version="1.0" encoding="utf-8"?>
 <p:presentation xmlns:p="http://schemas.openxmlformats.org/presentationml/2006/main">
   <p:sldMasterIdLst>
-    <p:sldMasterId xmlns:r="http://schemas.openxmlformats.org/officeDocument/2006/relationships" id="2147483648" r:id="R31bbc5cc39d846b6"/>
+    <p:sldMasterId xmlns:r="http://schemas.openxmlformats.org/officeDocument/2006/relationships" id="2147483648" r:id="R22fe502019e74c04"/>
   </p:sldMasterIdLst>
   <p:notesMasterIdLst>
-    <p:notesMasterId xmlns:r="http://schemas.openxmlformats.org/officeDocument/2006/relationships" r:id="R14909d1fb4494b60"/>
+    <p:notesMasterId xmlns:r="http://schemas.openxmlformats.org/officeDocument/2006/relationships" r:id="Rb9713bd539604dda"/>
   </p:notesMasterIdLst>
   <p:sldIdLst>
-    <p:sldId xmlns:r="http://schemas.openxmlformats.org/officeDocument/2006/relationships" id="256" r:id="R62122bc5e6f14e82"/>
-    <p:sldId xmlns:r="http://schemas.openxmlformats.org/officeDocument/2006/relationships" id="257" r:id="R59bc205e0fd2473e"/>
-    <p:sldId xmlns:r="http://schemas.openxmlformats.org/officeDocument/2006/relationships" id="258" r:id="Rff051705fcf84dc4"/>
-    <p:sldId xmlns:r="http://schemas.openxmlformats.org/officeDocument/2006/relationships" id="259" r:id="R034e92d91dd9460e"/>
-    <p:sldId xmlns:r="http://schemas.openxmlformats.org/officeDocument/2006/relationships" id="260" r:id="R46c3f11ea43843bb"/>
-    <p:sldId xmlns:r="http://schemas.openxmlformats.org/officeDocument/2006/relationships" id="261" r:id="R2b7140a04930426f"/>
-    <p:sldId xmlns:r="http://schemas.openxmlformats.org/officeDocument/2006/relationships" id="262" r:id="Re2ca782ca86f48c3"/>
-    <p:sldId xmlns:r="http://schemas.openxmlformats.org/officeDocument/2006/relationships" id="263" r:id="R192e0e00e42b4b50"/>
+    <p:sldId xmlns:r="http://schemas.openxmlformats.org/officeDocument/2006/relationships" id="256" r:id="R36d4e88e32224699"/>
+    <p:sldId xmlns:r="http://schemas.openxmlformats.org/officeDocument/2006/relationships" id="257" r:id="R414ecac8a1854fd4"/>
+    <p:sldId xmlns:r="http://schemas.openxmlformats.org/officeDocument/2006/relationships" id="258" r:id="R0a639cd186ad4c9c"/>
+    <p:sldId xmlns:r="http://schemas.openxmlformats.org/officeDocument/2006/relationships" id="259" r:id="Rae1b2c0b401447c1"/>
+    <p:sldId xmlns:r="http://schemas.openxmlformats.org/officeDocument/2006/relationships" id="260" r:id="Rcdd83611cb4c43d6"/>
+    <p:sldId xmlns:r="http://schemas.openxmlformats.org/officeDocument/2006/relationships" id="261" r:id="R2931d1fcd10349f3"/>
+    <p:sldId xmlns:r="http://schemas.openxmlformats.org/officeDocument/2006/relationships" id="262" r:id="R17af42fc00114ea8"/>
+    <p:sldId xmlns:r="http://schemas.openxmlformats.org/officeDocument/2006/relationships" id="263" r:id="Re0facad5d9a341fe"/>
   </p:sldIdLst>
   <p:sldSz cx="12192000" cy="6858000"/>
   <p:notesSz cx="6858000" cy="9144000"/>
@@ -1127,7 +1127,7 @@
   </p:cSld>
   <p:clrMap bg1="lt1" tx1="dk1" bg2="lt2" tx2="dk2" accent1="accent1" accent2="accent2" accent3="accent3" accent4="accent4" accent5="accent5" accent6="accent6" hlink="hlink" folHlink="folHlink"/>
   <p:sldLayoutIdLst>
-    <p:sldLayoutId xmlns:r="http://schemas.openxmlformats.org/officeDocument/2006/relationships" id="2147483649" r:id="Rceed9b3707454398"/>
+    <p:sldLayoutId xmlns:r="http://schemas.openxmlformats.org/officeDocument/2006/relationships" id="2147483649" r:id="Re3053b2e8065429f"/>
   </p:sldLayoutIdLst>
   <p:txStyles>
     <p:titleStyle>
@@ -1678,7 +1678,7 @@
           <p:cNvPr id="7" name="title-plane">
             <a:extLst xmlns:a="http://schemas.openxmlformats.org/drawingml/2006/main">
               <a:ext uri="{FF2B5EF4-FFF2-40B4-BE49-F238E27FC236}">
-                <a16:creationId xmlns:a16="http://schemas.microsoft.com/office/drawing/2014/main" id="{BBE2A673-C16F-4589-B8BE-67812C40E60B}"/>
+                <a16:creationId xmlns:a16="http://schemas.microsoft.com/office/drawing/2014/main" id="{228BED76-CDC1-479E-B84F-FFA366A42C0C}"/>
               </a:ext>
             </a:extLst>
           </p:cNvPr>
@@ -1713,8 +1713,8 @@
           <p:nvPr/>
         </p:nvPicPr>
         <p:blipFill>
-          <a:blip xmlns:r="http://schemas.openxmlformats.org/officeDocument/2006/relationships" xmlns:a="http://schemas.openxmlformats.org/drawingml/2006/main" r:embed="R6f5450ce02124d60"/>
-          <a:srcRect xmlns:a="http://schemas.openxmlformats.org/drawingml/2006/main" l="30134" t="0" r="30134" b="0"/>
+          <a:blip xmlns:r="http://schemas.openxmlformats.org/officeDocument/2006/relationships" xmlns:a="http://schemas.openxmlformats.org/drawingml/2006/main" r:embed="Rc3c4bdda3f1b4fcf"/>
+          <a:srcRect xmlns:a="http://schemas.openxmlformats.org/drawingml/2006/main" l="24074" t="0" r="24074" b="0"/>
           <a:stretch xmlns:a="http://schemas.openxmlformats.org/drawingml/2006/main">
             <a:fillRect l="0" t="0" r="0" b="0"/>
           </a:stretch>
@@ -1734,7 +1734,7 @@
           <p:cNvPr id="3" name="module-kicker">
             <a:extLst xmlns:a="http://schemas.openxmlformats.org/drawingml/2006/main">
               <a:ext uri="{FF2B5EF4-FFF2-40B4-BE49-F238E27FC236}">
-                <a16:creationId xmlns:a16="http://schemas.microsoft.com/office/drawing/2014/main" id="{8E2DFE7E-5DC7-4B9B-97A7-9BBB83D0DDDF}"/>
+                <a16:creationId xmlns:a16="http://schemas.microsoft.com/office/drawing/2014/main" id="{C6DD4336-CBA2-4454-A0E6-990D72844374}"/>
               </a:ext>
             </a:extLst>
           </p:cNvPr>
@@ -1784,7 +1784,7 @@
           <p:cNvPr id="4" name="deck-title">
             <a:extLst xmlns:a="http://schemas.openxmlformats.org/drawingml/2006/main">
               <a:ext uri="{FF2B5EF4-FFF2-40B4-BE49-F238E27FC236}">
-                <a16:creationId xmlns:a16="http://schemas.microsoft.com/office/drawing/2014/main" id="{B78569E0-02AD-47A9-AB15-C1DE71DAF162}"/>
+                <a16:creationId xmlns:a16="http://schemas.microsoft.com/office/drawing/2014/main" id="{4A2EC57D-C6F9-4F20-B4B3-F5232DE70BAB}"/>
               </a:ext>
             </a:extLst>
           </p:cNvPr>
@@ -1834,7 +1834,7 @@
           <p:cNvPr id="5" name="deck-subtitle">
             <a:extLst xmlns:a="http://schemas.openxmlformats.org/drawingml/2006/main">
               <a:ext uri="{FF2B5EF4-FFF2-40B4-BE49-F238E27FC236}">
-                <a16:creationId xmlns:a16="http://schemas.microsoft.com/office/drawing/2014/main" id="{0C3EB678-3C89-4B68-8386-BA0A877EED91}"/>
+                <a16:creationId xmlns:a16="http://schemas.microsoft.com/office/drawing/2014/main" id="{A4EF77B2-22B9-4275-9FBC-65D2BC954164}"/>
               </a:ext>
             </a:extLst>
           </p:cNvPr>
@@ -1884,7 +1884,7 @@
           <p:cNvPr id="6" name="deck-footer">
             <a:extLst xmlns:a="http://schemas.openxmlformats.org/drawingml/2006/main">
               <a:ext uri="{FF2B5EF4-FFF2-40B4-BE49-F238E27FC236}">
-                <a16:creationId xmlns:a16="http://schemas.microsoft.com/office/drawing/2014/main" id="{5B83E998-5108-4316-8436-97805D1AFF09}"/>
+                <a16:creationId xmlns:a16="http://schemas.microsoft.com/office/drawing/2014/main" id="{C6D8D486-FD4E-403C-B416-023A1D0090FC}"/>
               </a:ext>
             </a:extLst>
           </p:cNvPr>
@@ -1932,7 +1932,7 @@
     </p:spTree>
     <p:extLst>
       <p:ext uri="{BB962C8B-B14F-4D97-AF65-F5344CB8AC3E}">
-        <p14:creationId xmlns:p14="http://schemas.microsoft.com/office/powerpoint/2010/main" val="2115472555"/>
+        <p14:creationId xmlns:p14="http://schemas.microsoft.com/office/powerpoint/2010/main" val="578715673"/>
       </p:ext>
     </p:extLst>
   </p:cSld>
@@ -1963,7 +1963,7 @@
           <p:cNvPr id="15" name="top-rule">
             <a:extLst xmlns:a="http://schemas.openxmlformats.org/drawingml/2006/main">
               <a:ext uri="{FF2B5EF4-FFF2-40B4-BE49-F238E27FC236}">
-                <a16:creationId xmlns:a16="http://schemas.microsoft.com/office/drawing/2014/main" id="{EF56C75D-CA1D-47FA-9803-881722E47570}"/>
+                <a16:creationId xmlns:a16="http://schemas.microsoft.com/office/drawing/2014/main" id="{AE71CF69-9C15-4456-9C83-2B2CBB556D45}"/>
               </a:ext>
             </a:extLst>
           </p:cNvPr>
@@ -1994,7 +1994,7 @@
           <p:cNvPr id="2" name="course-label">
             <a:extLst xmlns:a="http://schemas.openxmlformats.org/drawingml/2006/main">
               <a:ext uri="{FF2B5EF4-FFF2-40B4-BE49-F238E27FC236}">
-                <a16:creationId xmlns:a16="http://schemas.microsoft.com/office/drawing/2014/main" id="{882F80C0-C337-4C6D-85F8-E1046CE89CAF}"/>
+                <a16:creationId xmlns:a16="http://schemas.microsoft.com/office/drawing/2014/main" id="{D703E715-5140-4DD8-8B00-C66FB60E6505}"/>
               </a:ext>
             </a:extLst>
           </p:cNvPr>
@@ -2044,7 +2044,7 @@
           <p:cNvPr id="3" name="module-label">
             <a:extLst xmlns:a="http://schemas.openxmlformats.org/drawingml/2006/main">
               <a:ext uri="{FF2B5EF4-FFF2-40B4-BE49-F238E27FC236}">
-                <a16:creationId xmlns:a16="http://schemas.microsoft.com/office/drawing/2014/main" id="{7A0E292E-7806-4504-8760-0F352F88813D}"/>
+                <a16:creationId xmlns:a16="http://schemas.microsoft.com/office/drawing/2014/main" id="{A169350E-F6C7-403C-806C-4B34544F2DDA}"/>
               </a:ext>
             </a:extLst>
           </p:cNvPr>
@@ -2094,7 +2094,7 @@
           <p:cNvPr id="4" name="slide-title">
             <a:extLst xmlns:a="http://schemas.openxmlformats.org/drawingml/2006/main">
               <a:ext uri="{FF2B5EF4-FFF2-40B4-BE49-F238E27FC236}">
-                <a16:creationId xmlns:a16="http://schemas.microsoft.com/office/drawing/2014/main" id="{2A5A2510-1955-4726-BE23-A70979C09CB3}"/>
+                <a16:creationId xmlns:a16="http://schemas.microsoft.com/office/drawing/2014/main" id="{DD23CF65-045F-45C8-B3B2-22EC8F4EB687}"/>
               </a:ext>
             </a:extLst>
           </p:cNvPr>
@@ -2144,7 +2144,7 @@
           <p:cNvPr id="5" name="slide-subtitle">
             <a:extLst xmlns:a="http://schemas.openxmlformats.org/drawingml/2006/main">
               <a:ext uri="{FF2B5EF4-FFF2-40B4-BE49-F238E27FC236}">
-                <a16:creationId xmlns:a16="http://schemas.microsoft.com/office/drawing/2014/main" id="{E9CB9CBA-7733-47E7-83FE-1286C05AC1EF}"/>
+                <a16:creationId xmlns:a16="http://schemas.microsoft.com/office/drawing/2014/main" id="{8AB1D001-E962-419A-9576-3CEC9E2EAB63}"/>
               </a:ext>
             </a:extLst>
           </p:cNvPr>
@@ -2194,7 +2194,7 @@
           <p:cNvPr id="6" name="bullet-1">
             <a:extLst xmlns:a="http://schemas.openxmlformats.org/drawingml/2006/main">
               <a:ext uri="{FF2B5EF4-FFF2-40B4-BE49-F238E27FC236}">
-                <a16:creationId xmlns:a16="http://schemas.microsoft.com/office/drawing/2014/main" id="{DDAB0372-148C-41D3-B80C-11A4AC61E865}"/>
+                <a16:creationId xmlns:a16="http://schemas.microsoft.com/office/drawing/2014/main" id="{E7C88555-060A-428C-AB9C-1E498D26E548}"/>
               </a:ext>
             </a:extLst>
           </p:cNvPr>
@@ -2225,7 +2225,7 @@
           <p:cNvPr id="7" name="bullet-number-1">
             <a:extLst xmlns:a="http://schemas.openxmlformats.org/drawingml/2006/main">
               <a:ext uri="{FF2B5EF4-FFF2-40B4-BE49-F238E27FC236}">
-                <a16:creationId xmlns:a16="http://schemas.microsoft.com/office/drawing/2014/main" id="{0812660B-FFEC-49F5-A704-B7DBBCB1D357}"/>
+                <a16:creationId xmlns:a16="http://schemas.microsoft.com/office/drawing/2014/main" id="{2EDBB02A-56A3-4B64-B8A7-3955CF6AA303}"/>
               </a:ext>
             </a:extLst>
           </p:cNvPr>
@@ -2275,7 +2275,7 @@
           <p:cNvPr id="8" name="bullet-copy-1">
             <a:extLst xmlns:a="http://schemas.openxmlformats.org/drawingml/2006/main">
               <a:ext uri="{FF2B5EF4-FFF2-40B4-BE49-F238E27FC236}">
-                <a16:creationId xmlns:a16="http://schemas.microsoft.com/office/drawing/2014/main" id="{4696D337-E296-4F84-A97E-CC2308C552BF}"/>
+                <a16:creationId xmlns:a16="http://schemas.microsoft.com/office/drawing/2014/main" id="{2C592F36-0FD8-4DFE-9DDE-65E098BA53A1}"/>
               </a:ext>
             </a:extLst>
           </p:cNvPr>
@@ -2325,7 +2325,7 @@
           <p:cNvPr id="9" name="bullet-2">
             <a:extLst xmlns:a="http://schemas.openxmlformats.org/drawingml/2006/main">
               <a:ext uri="{FF2B5EF4-FFF2-40B4-BE49-F238E27FC236}">
-                <a16:creationId xmlns:a16="http://schemas.microsoft.com/office/drawing/2014/main" id="{EBDC1D9F-BDF9-4D84-9D2E-B53AD301166F}"/>
+                <a16:creationId xmlns:a16="http://schemas.microsoft.com/office/drawing/2014/main" id="{225A7E17-26B6-4151-A217-FEBB78D876C3}"/>
               </a:ext>
             </a:extLst>
           </p:cNvPr>
@@ -2356,7 +2356,7 @@
           <p:cNvPr id="10" name="bullet-number-2">
             <a:extLst xmlns:a="http://schemas.openxmlformats.org/drawingml/2006/main">
               <a:ext uri="{FF2B5EF4-FFF2-40B4-BE49-F238E27FC236}">
-                <a16:creationId xmlns:a16="http://schemas.microsoft.com/office/drawing/2014/main" id="{FB2907F1-2E95-44B4-A118-FB8177B5F7DA}"/>
+                <a16:creationId xmlns:a16="http://schemas.microsoft.com/office/drawing/2014/main" id="{215A5FC0-1CF3-40D0-B5FF-B8BD45E2E566}"/>
               </a:ext>
             </a:extLst>
           </p:cNvPr>
@@ -2406,7 +2406,7 @@
           <p:cNvPr id="11" name="bullet-copy-2">
             <a:extLst xmlns:a="http://schemas.openxmlformats.org/drawingml/2006/main">
               <a:ext uri="{FF2B5EF4-FFF2-40B4-BE49-F238E27FC236}">
-                <a16:creationId xmlns:a16="http://schemas.microsoft.com/office/drawing/2014/main" id="{B89B9A16-3376-48B7-87C9-76BEC5199FE1}"/>
+                <a16:creationId xmlns:a16="http://schemas.microsoft.com/office/drawing/2014/main" id="{888F2A68-014B-460B-83A2-B450B1243B74}"/>
               </a:ext>
             </a:extLst>
           </p:cNvPr>
@@ -2456,7 +2456,7 @@
           <p:cNvPr id="12" name="bullet-3">
             <a:extLst xmlns:a="http://schemas.openxmlformats.org/drawingml/2006/main">
               <a:ext uri="{FF2B5EF4-FFF2-40B4-BE49-F238E27FC236}">
-                <a16:creationId xmlns:a16="http://schemas.microsoft.com/office/drawing/2014/main" id="{8164FE5D-B795-4937-958D-EE79C8CF30A4}"/>
+                <a16:creationId xmlns:a16="http://schemas.microsoft.com/office/drawing/2014/main" id="{63367375-ECDD-4367-A263-0D512F51C4AB}"/>
               </a:ext>
             </a:extLst>
           </p:cNvPr>
@@ -2487,7 +2487,7 @@
           <p:cNvPr id="13" name="bullet-number-3">
             <a:extLst xmlns:a="http://schemas.openxmlformats.org/drawingml/2006/main">
               <a:ext uri="{FF2B5EF4-FFF2-40B4-BE49-F238E27FC236}">
-                <a16:creationId xmlns:a16="http://schemas.microsoft.com/office/drawing/2014/main" id="{C60CEBB3-3F99-4CC5-A5AC-032C2467B3D8}"/>
+                <a16:creationId xmlns:a16="http://schemas.microsoft.com/office/drawing/2014/main" id="{53674D7D-6CB8-469C-86F2-97E127A0E79C}"/>
               </a:ext>
             </a:extLst>
           </p:cNvPr>
@@ -2537,7 +2537,7 @@
           <p:cNvPr id="14" name="bullet-copy-3">
             <a:extLst xmlns:a="http://schemas.openxmlformats.org/drawingml/2006/main">
               <a:ext uri="{FF2B5EF4-FFF2-40B4-BE49-F238E27FC236}">
-                <a16:creationId xmlns:a16="http://schemas.microsoft.com/office/drawing/2014/main" id="{B0D7D993-CF8A-4303-B0E4-3C60C7F5979F}"/>
+                <a16:creationId xmlns:a16="http://schemas.microsoft.com/office/drawing/2014/main" id="{20549D22-C283-4786-9F4B-B07A99060384}"/>
               </a:ext>
             </a:extLst>
           </p:cNvPr>
@@ -2585,7 +2585,7 @@
     </p:spTree>
     <p:extLst>
       <p:ext uri="{BB962C8B-B14F-4D97-AF65-F5344CB8AC3E}">
-        <p14:creationId xmlns:p14="http://schemas.microsoft.com/office/powerpoint/2010/main" val="874701640"/>
+        <p14:creationId xmlns:p14="http://schemas.microsoft.com/office/powerpoint/2010/main" val="2022821255"/>
       </p:ext>
     </p:extLst>
   </p:cSld>
@@ -2616,7 +2616,7 @@
           <p:cNvPr id="15" name="top-rule">
             <a:extLst xmlns:a="http://schemas.openxmlformats.org/drawingml/2006/main">
               <a:ext uri="{FF2B5EF4-FFF2-40B4-BE49-F238E27FC236}">
-                <a16:creationId xmlns:a16="http://schemas.microsoft.com/office/drawing/2014/main" id="{7E799E20-D068-4376-915D-29C6E46A8ECB}"/>
+                <a16:creationId xmlns:a16="http://schemas.microsoft.com/office/drawing/2014/main" id="{7D1D5C35-1033-48A0-A567-1047DF4F32B2}"/>
               </a:ext>
             </a:extLst>
           </p:cNvPr>
@@ -2647,7 +2647,7 @@
           <p:cNvPr id="2" name="course-label">
             <a:extLst xmlns:a="http://schemas.openxmlformats.org/drawingml/2006/main">
               <a:ext uri="{FF2B5EF4-FFF2-40B4-BE49-F238E27FC236}">
-                <a16:creationId xmlns:a16="http://schemas.microsoft.com/office/drawing/2014/main" id="{0A6E1277-D338-42AF-8A14-10A10AAF154B}"/>
+                <a16:creationId xmlns:a16="http://schemas.microsoft.com/office/drawing/2014/main" id="{EBE3A0F5-3ADC-4BE8-9EC5-367224E47127}"/>
               </a:ext>
             </a:extLst>
           </p:cNvPr>
@@ -2697,7 +2697,7 @@
           <p:cNvPr id="3" name="module-label">
             <a:extLst xmlns:a="http://schemas.openxmlformats.org/drawingml/2006/main">
               <a:ext uri="{FF2B5EF4-FFF2-40B4-BE49-F238E27FC236}">
-                <a16:creationId xmlns:a16="http://schemas.microsoft.com/office/drawing/2014/main" id="{5976DAFE-4DE4-4D1F-8817-2C5D36712D6E}"/>
+                <a16:creationId xmlns:a16="http://schemas.microsoft.com/office/drawing/2014/main" id="{AB68437A-D485-47A4-90B7-E9DA805A8A3E}"/>
               </a:ext>
             </a:extLst>
           </p:cNvPr>
@@ -2747,7 +2747,7 @@
           <p:cNvPr id="4" name="slide-title">
             <a:extLst xmlns:a="http://schemas.openxmlformats.org/drawingml/2006/main">
               <a:ext uri="{FF2B5EF4-FFF2-40B4-BE49-F238E27FC236}">
-                <a16:creationId xmlns:a16="http://schemas.microsoft.com/office/drawing/2014/main" id="{EA0D2943-07D1-4F02-9DF4-ED81C3487AC7}"/>
+                <a16:creationId xmlns:a16="http://schemas.microsoft.com/office/drawing/2014/main" id="{2042490C-D5F0-4CDF-9891-A86E69C65EA2}"/>
               </a:ext>
             </a:extLst>
           </p:cNvPr>
@@ -2797,7 +2797,7 @@
           <p:cNvPr id="5" name="slide-subtitle">
             <a:extLst xmlns:a="http://schemas.openxmlformats.org/drawingml/2006/main">
               <a:ext uri="{FF2B5EF4-FFF2-40B4-BE49-F238E27FC236}">
-                <a16:creationId xmlns:a16="http://schemas.microsoft.com/office/drawing/2014/main" id="{D528C94B-53C2-4A97-8264-B10215C386AE}"/>
+                <a16:creationId xmlns:a16="http://schemas.microsoft.com/office/drawing/2014/main" id="{76FE9A1C-78AE-4353-86F9-7DAB90EE1AC9}"/>
               </a:ext>
             </a:extLst>
           </p:cNvPr>
@@ -2847,7 +2847,7 @@
           <p:cNvPr id="6" name="bullet-1">
             <a:extLst xmlns:a="http://schemas.openxmlformats.org/drawingml/2006/main">
               <a:ext uri="{FF2B5EF4-FFF2-40B4-BE49-F238E27FC236}">
-                <a16:creationId xmlns:a16="http://schemas.microsoft.com/office/drawing/2014/main" id="{7E14C4A8-BBF2-48BB-88C7-7A82D07743C2}"/>
+                <a16:creationId xmlns:a16="http://schemas.microsoft.com/office/drawing/2014/main" id="{4AAF3832-5B05-427F-A120-6B732E926BD5}"/>
               </a:ext>
             </a:extLst>
           </p:cNvPr>
@@ -2878,7 +2878,7 @@
           <p:cNvPr id="7" name="bullet-number-1">
             <a:extLst xmlns:a="http://schemas.openxmlformats.org/drawingml/2006/main">
               <a:ext uri="{FF2B5EF4-FFF2-40B4-BE49-F238E27FC236}">
-                <a16:creationId xmlns:a16="http://schemas.microsoft.com/office/drawing/2014/main" id="{F34754FD-AD01-492D-BCAE-FB531CBE9AD9}"/>
+                <a16:creationId xmlns:a16="http://schemas.microsoft.com/office/drawing/2014/main" id="{10B7F887-4A92-4BE4-9E88-7829B19B5CEB}"/>
               </a:ext>
             </a:extLst>
           </p:cNvPr>
@@ -2928,7 +2928,7 @@
           <p:cNvPr id="8" name="bullet-copy-1">
             <a:extLst xmlns:a="http://schemas.openxmlformats.org/drawingml/2006/main">
               <a:ext uri="{FF2B5EF4-FFF2-40B4-BE49-F238E27FC236}">
-                <a16:creationId xmlns:a16="http://schemas.microsoft.com/office/drawing/2014/main" id="{697746C6-7985-412B-9495-A7AF48A9CB6F}"/>
+                <a16:creationId xmlns:a16="http://schemas.microsoft.com/office/drawing/2014/main" id="{09E55D82-F9BE-4CF5-BD09-7B7082541F5E}"/>
               </a:ext>
             </a:extLst>
           </p:cNvPr>
@@ -2978,7 +2978,7 @@
           <p:cNvPr id="9" name="bullet-2">
             <a:extLst xmlns:a="http://schemas.openxmlformats.org/drawingml/2006/main">
               <a:ext uri="{FF2B5EF4-FFF2-40B4-BE49-F238E27FC236}">
-                <a16:creationId xmlns:a16="http://schemas.microsoft.com/office/drawing/2014/main" id="{38D6FD5B-259C-4236-B86C-02FEEE97CF31}"/>
+                <a16:creationId xmlns:a16="http://schemas.microsoft.com/office/drawing/2014/main" id="{1ACDD8C3-20D3-410D-A2D1-5BA317D95607}"/>
               </a:ext>
             </a:extLst>
           </p:cNvPr>
@@ -3009,7 +3009,7 @@
           <p:cNvPr id="10" name="bullet-number-2">
             <a:extLst xmlns:a="http://schemas.openxmlformats.org/drawingml/2006/main">
               <a:ext uri="{FF2B5EF4-FFF2-40B4-BE49-F238E27FC236}">
-                <a16:creationId xmlns:a16="http://schemas.microsoft.com/office/drawing/2014/main" id="{B8C69C39-98F2-44CC-8042-E2DF0FE6AC6C}"/>
+                <a16:creationId xmlns:a16="http://schemas.microsoft.com/office/drawing/2014/main" id="{1351A82F-B8AA-4B34-92E6-925E617D2470}"/>
               </a:ext>
             </a:extLst>
           </p:cNvPr>
@@ -3059,7 +3059,7 @@
           <p:cNvPr id="11" name="bullet-copy-2">
             <a:extLst xmlns:a="http://schemas.openxmlformats.org/drawingml/2006/main">
               <a:ext uri="{FF2B5EF4-FFF2-40B4-BE49-F238E27FC236}">
-                <a16:creationId xmlns:a16="http://schemas.microsoft.com/office/drawing/2014/main" id="{4AADE158-883F-463D-A129-1E02746FF839}"/>
+                <a16:creationId xmlns:a16="http://schemas.microsoft.com/office/drawing/2014/main" id="{5089EE09-29D1-4C7D-99D4-03741EE1131E}"/>
               </a:ext>
             </a:extLst>
           </p:cNvPr>
@@ -3099,7 +3099,7 @@
                   <a:srgbClr val="16343A"/>
                 </a:solidFill>
               </a:rPr>
-              <a:t>Keep fingers away from the needle area and sew only at a speed you can control.</a:t>
+              <a:t>The operator controls the pace and should never use speed to hide uncertainty.</a:t>
             </a:r>
           </a:p>
         </p:txBody>
@@ -3109,7 +3109,7 @@
           <p:cNvPr id="12" name="bullet-3">
             <a:extLst xmlns:a="http://schemas.openxmlformats.org/drawingml/2006/main">
               <a:ext uri="{FF2B5EF4-FFF2-40B4-BE49-F238E27FC236}">
-                <a16:creationId xmlns:a16="http://schemas.microsoft.com/office/drawing/2014/main" id="{4D3A9360-F5D4-4187-8D0C-AB5DCAEF7641}"/>
+                <a16:creationId xmlns:a16="http://schemas.microsoft.com/office/drawing/2014/main" id="{A4FDB123-6580-41A0-AF29-8603A1A78144}"/>
               </a:ext>
             </a:extLst>
           </p:cNvPr>
@@ -3140,7 +3140,7 @@
           <p:cNvPr id="13" name="bullet-number-3">
             <a:extLst xmlns:a="http://schemas.openxmlformats.org/drawingml/2006/main">
               <a:ext uri="{FF2B5EF4-FFF2-40B4-BE49-F238E27FC236}">
-                <a16:creationId xmlns:a16="http://schemas.microsoft.com/office/drawing/2014/main" id="{D93C7628-0A96-4628-82B1-FE1E21B5A9CA}"/>
+                <a16:creationId xmlns:a16="http://schemas.microsoft.com/office/drawing/2014/main" id="{78E62041-49CE-45DD-8BDF-14602A24DBC5}"/>
               </a:ext>
             </a:extLst>
           </p:cNvPr>
@@ -3190,7 +3190,7 @@
           <p:cNvPr id="14" name="bullet-copy-3">
             <a:extLst xmlns:a="http://schemas.openxmlformats.org/drawingml/2006/main">
               <a:ext uri="{FF2B5EF4-FFF2-40B4-BE49-F238E27FC236}">
-                <a16:creationId xmlns:a16="http://schemas.microsoft.com/office/drawing/2014/main" id="{07FDF4AD-A90E-4FA0-9E1E-EC85CBB88CF1}"/>
+                <a16:creationId xmlns:a16="http://schemas.microsoft.com/office/drawing/2014/main" id="{EC093D1C-995C-4910-A251-CC4C8E7783D9}"/>
               </a:ext>
             </a:extLst>
           </p:cNvPr>
@@ -3230,7 +3230,7 @@
                   <a:srgbClr val="16343A"/>
                 </a:solidFill>
               </a:rPr>
-              <a:t>Switch off equipment before threading, inserting a bobbin or making adjustments unless the teacher demonstrates a different safe procedure for that machine.</a:t>
+              <a:t>The general rule is consistent: do not guess around moving parts.</a:t>
             </a:r>
           </a:p>
         </p:txBody>
@@ -3238,7 +3238,7 @@
     </p:spTree>
     <p:extLst>
       <p:ext uri="{BB962C8B-B14F-4D97-AF65-F5344CB8AC3E}">
-        <p14:creationId xmlns:p14="http://schemas.microsoft.com/office/powerpoint/2010/main" val="297673398"/>
+        <p14:creationId xmlns:p14="http://schemas.microsoft.com/office/powerpoint/2010/main" val="695103462"/>
       </p:ext>
     </p:extLst>
   </p:cSld>
@@ -3269,7 +3269,7 @@
           <p:cNvPr id="12" name="top-rule">
             <a:extLst xmlns:a="http://schemas.openxmlformats.org/drawingml/2006/main">
               <a:ext uri="{FF2B5EF4-FFF2-40B4-BE49-F238E27FC236}">
-                <a16:creationId xmlns:a16="http://schemas.microsoft.com/office/drawing/2014/main" id="{CEA5203D-2C3E-42DC-911A-49CBD6C4DF8E}"/>
+                <a16:creationId xmlns:a16="http://schemas.microsoft.com/office/drawing/2014/main" id="{2020958B-0C94-4D35-81A9-251D146E0BF0}"/>
               </a:ext>
             </a:extLst>
           </p:cNvPr>
@@ -3300,7 +3300,7 @@
           <p:cNvPr id="2" name="course-label">
             <a:extLst xmlns:a="http://schemas.openxmlformats.org/drawingml/2006/main">
               <a:ext uri="{FF2B5EF4-FFF2-40B4-BE49-F238E27FC236}">
-                <a16:creationId xmlns:a16="http://schemas.microsoft.com/office/drawing/2014/main" id="{A1F474F6-CEC4-4C9D-BAE6-8C5992CB93C7}"/>
+                <a16:creationId xmlns:a16="http://schemas.microsoft.com/office/drawing/2014/main" id="{4A38DCA2-4716-457C-82E3-A1C7E957823C}"/>
               </a:ext>
             </a:extLst>
           </p:cNvPr>
@@ -3350,7 +3350,7 @@
           <p:cNvPr id="3" name="module-label">
             <a:extLst xmlns:a="http://schemas.openxmlformats.org/drawingml/2006/main">
               <a:ext uri="{FF2B5EF4-FFF2-40B4-BE49-F238E27FC236}">
-                <a16:creationId xmlns:a16="http://schemas.microsoft.com/office/drawing/2014/main" id="{69114425-A78D-44A5-B1F1-4904E3595168}"/>
+                <a16:creationId xmlns:a16="http://schemas.microsoft.com/office/drawing/2014/main" id="{C1411157-DE50-4A98-AA7B-406DDEC7FA48}"/>
               </a:ext>
             </a:extLst>
           </p:cNvPr>
@@ -3400,7 +3400,7 @@
           <p:cNvPr id="4" name="slide-title">
             <a:extLst xmlns:a="http://schemas.openxmlformats.org/drawingml/2006/main">
               <a:ext uri="{FF2B5EF4-FFF2-40B4-BE49-F238E27FC236}">
-                <a16:creationId xmlns:a16="http://schemas.microsoft.com/office/drawing/2014/main" id="{BD73DBCD-73BB-4EA1-A80C-C610CBE5485A}"/>
+                <a16:creationId xmlns:a16="http://schemas.microsoft.com/office/drawing/2014/main" id="{1560FE87-9433-4E25-BD62-7D37A07240C9}"/>
               </a:ext>
             </a:extLst>
           </p:cNvPr>
@@ -3450,7 +3450,7 @@
           <p:cNvPr id="5" name="slide-subtitle">
             <a:extLst xmlns:a="http://schemas.openxmlformats.org/drawingml/2006/main">
               <a:ext uri="{FF2B5EF4-FFF2-40B4-BE49-F238E27FC236}">
-                <a16:creationId xmlns:a16="http://schemas.microsoft.com/office/drawing/2014/main" id="{9941CF90-3DFF-467F-A869-0166ABDDAB96}"/>
+                <a16:creationId xmlns:a16="http://schemas.microsoft.com/office/drawing/2014/main" id="{BE1B27BA-42E6-43CF-8276-898983ECA3FC}"/>
               </a:ext>
             </a:extLst>
           </p:cNvPr>
@@ -3500,7 +3500,7 @@
           <p:cNvPr id="6" name="prompt-accent">
             <a:extLst xmlns:a="http://schemas.openxmlformats.org/drawingml/2006/main">
               <a:ext uri="{FF2B5EF4-FFF2-40B4-BE49-F238E27FC236}">
-                <a16:creationId xmlns:a16="http://schemas.microsoft.com/office/drawing/2014/main" id="{80D6A53F-72C5-418C-939D-9559E24D581A}"/>
+                <a16:creationId xmlns:a16="http://schemas.microsoft.com/office/drawing/2014/main" id="{8228D2EC-4064-4634-8CE2-D4A55315DE90}"/>
               </a:ext>
             </a:extLst>
           </p:cNvPr>
@@ -3531,7 +3531,7 @@
           <p:cNvPr id="7" name="plain-language">
             <a:extLst xmlns:a="http://schemas.openxmlformats.org/drawingml/2006/main">
               <a:ext uri="{FF2B5EF4-FFF2-40B4-BE49-F238E27FC236}">
-                <a16:creationId xmlns:a16="http://schemas.microsoft.com/office/drawing/2014/main" id="{A49C2CEF-4CF2-4CDE-ADB3-CBB81F21C1F7}"/>
+                <a16:creationId xmlns:a16="http://schemas.microsoft.com/office/drawing/2014/main" id="{D7B70568-0A83-4663-A184-00C5E154312C}"/>
               </a:ext>
             </a:extLst>
           </p:cNvPr>
@@ -3581,7 +3581,7 @@
           <p:cNvPr id="8" name="clarify">
             <a:extLst xmlns:a="http://schemas.openxmlformats.org/drawingml/2006/main">
               <a:ext uri="{FF2B5EF4-FFF2-40B4-BE49-F238E27FC236}">
-                <a16:creationId xmlns:a16="http://schemas.microsoft.com/office/drawing/2014/main" id="{C9A2C71F-3EE6-4BC6-9B2F-E1460CE51D1C}"/>
+                <a16:creationId xmlns:a16="http://schemas.microsoft.com/office/drawing/2014/main" id="{D7ADD234-ABB6-40D2-AE5C-AAF2F678F6C7}"/>
               </a:ext>
             </a:extLst>
           </p:cNvPr>
@@ -3631,7 +3631,7 @@
           <p:cNvPr id="9" name="starter-label">
             <a:extLst xmlns:a="http://schemas.openxmlformats.org/drawingml/2006/main">
               <a:ext uri="{FF2B5EF4-FFF2-40B4-BE49-F238E27FC236}">
-                <a16:creationId xmlns:a16="http://schemas.microsoft.com/office/drawing/2014/main" id="{0145A717-7B02-4F96-B6F8-719966511B1A}"/>
+                <a16:creationId xmlns:a16="http://schemas.microsoft.com/office/drawing/2014/main" id="{1F28E566-9C81-403A-A8A7-C51E8FDACC39}"/>
               </a:ext>
             </a:extLst>
           </p:cNvPr>
@@ -3681,7 +3681,7 @@
           <p:cNvPr id="10" name="starter">
             <a:extLst xmlns:a="http://schemas.openxmlformats.org/drawingml/2006/main">
               <a:ext uri="{FF2B5EF4-FFF2-40B4-BE49-F238E27FC236}">
-                <a16:creationId xmlns:a16="http://schemas.microsoft.com/office/drawing/2014/main" id="{9205E7F2-E616-4298-ABA0-713FC3BA87C4}"/>
+                <a16:creationId xmlns:a16="http://schemas.microsoft.com/office/drawing/2014/main" id="{7E9E7D62-A366-4CAB-9A0D-B25A4598AB65}"/>
               </a:ext>
             </a:extLst>
           </p:cNvPr>
@@ -3731,7 +3731,7 @@
           <p:cNvPr id="11" name="action">
             <a:extLst xmlns:a="http://schemas.openxmlformats.org/drawingml/2006/main">
               <a:ext uri="{FF2B5EF4-FFF2-40B4-BE49-F238E27FC236}">
-                <a16:creationId xmlns:a16="http://schemas.microsoft.com/office/drawing/2014/main" id="{147C4276-6DE6-4359-B1B4-3A943B5E3190}"/>
+                <a16:creationId xmlns:a16="http://schemas.microsoft.com/office/drawing/2014/main" id="{37A315E5-2B69-4E16-9DD4-837E9246102C}"/>
               </a:ext>
             </a:extLst>
           </p:cNvPr>
@@ -3779,7 +3779,7 @@
     </p:spTree>
     <p:extLst>
       <p:ext uri="{BB962C8B-B14F-4D97-AF65-F5344CB8AC3E}">
-        <p14:creationId xmlns:p14="http://schemas.microsoft.com/office/powerpoint/2010/main" val="1310761174"/>
+        <p14:creationId xmlns:p14="http://schemas.microsoft.com/office/powerpoint/2010/main" val="321197957"/>
       </p:ext>
     </p:extLst>
   </p:cSld>
@@ -3810,7 +3810,7 @@
           <p:cNvPr id="15" name="top-rule">
             <a:extLst xmlns:a="http://schemas.openxmlformats.org/drawingml/2006/main">
               <a:ext uri="{FF2B5EF4-FFF2-40B4-BE49-F238E27FC236}">
-                <a16:creationId xmlns:a16="http://schemas.microsoft.com/office/drawing/2014/main" id="{A981A744-B8C0-4561-BF1F-83EE4134CCCE}"/>
+                <a16:creationId xmlns:a16="http://schemas.microsoft.com/office/drawing/2014/main" id="{02E901C4-FAA2-4C81-A1A1-8DD9EE10DBA7}"/>
               </a:ext>
             </a:extLst>
           </p:cNvPr>
@@ -3841,7 +3841,7 @@
           <p:cNvPr id="2" name="course-label">
             <a:extLst xmlns:a="http://schemas.openxmlformats.org/drawingml/2006/main">
               <a:ext uri="{FF2B5EF4-FFF2-40B4-BE49-F238E27FC236}">
-                <a16:creationId xmlns:a16="http://schemas.microsoft.com/office/drawing/2014/main" id="{19B5C26D-005B-4687-A054-C05F379383EF}"/>
+                <a16:creationId xmlns:a16="http://schemas.microsoft.com/office/drawing/2014/main" id="{FE400ADC-A384-4F25-921C-09A8769E496F}"/>
               </a:ext>
             </a:extLst>
           </p:cNvPr>
@@ -3891,7 +3891,7 @@
           <p:cNvPr id="3" name="module-label">
             <a:extLst xmlns:a="http://schemas.openxmlformats.org/drawingml/2006/main">
               <a:ext uri="{FF2B5EF4-FFF2-40B4-BE49-F238E27FC236}">
-                <a16:creationId xmlns:a16="http://schemas.microsoft.com/office/drawing/2014/main" id="{9A895593-B453-43FB-A81C-7956DA64F2F6}"/>
+                <a16:creationId xmlns:a16="http://schemas.microsoft.com/office/drawing/2014/main" id="{6AC3F59B-C316-4777-AF32-AC5B4FB59919}"/>
               </a:ext>
             </a:extLst>
           </p:cNvPr>
@@ -3941,7 +3941,7 @@
           <p:cNvPr id="4" name="slide-title">
             <a:extLst xmlns:a="http://schemas.openxmlformats.org/drawingml/2006/main">
               <a:ext uri="{FF2B5EF4-FFF2-40B4-BE49-F238E27FC236}">
-                <a16:creationId xmlns:a16="http://schemas.microsoft.com/office/drawing/2014/main" id="{28863AAC-F34A-4D1F-ACEE-BAB77FADCFD3}"/>
+                <a16:creationId xmlns:a16="http://schemas.microsoft.com/office/drawing/2014/main" id="{63A47417-2C38-461A-A782-2D8F8AAF4D24}"/>
               </a:ext>
             </a:extLst>
           </p:cNvPr>
@@ -3991,7 +3991,7 @@
           <p:cNvPr id="5" name="slide-subtitle">
             <a:extLst xmlns:a="http://schemas.openxmlformats.org/drawingml/2006/main">
               <a:ext uri="{FF2B5EF4-FFF2-40B4-BE49-F238E27FC236}">
-                <a16:creationId xmlns:a16="http://schemas.microsoft.com/office/drawing/2014/main" id="{91D3FBD6-C0C3-46B4-8116-CA0DE3DF5052}"/>
+                <a16:creationId xmlns:a16="http://schemas.microsoft.com/office/drawing/2014/main" id="{C2842888-61AD-48C1-B265-C0089866F4E4}"/>
               </a:ext>
             </a:extLst>
           </p:cNvPr>
@@ -4041,7 +4041,7 @@
           <p:cNvPr id="6" name="bullet-1">
             <a:extLst xmlns:a="http://schemas.openxmlformats.org/drawingml/2006/main">
               <a:ext uri="{FF2B5EF4-FFF2-40B4-BE49-F238E27FC236}">
-                <a16:creationId xmlns:a16="http://schemas.microsoft.com/office/drawing/2014/main" id="{EA682F19-F375-4847-9742-3B1BF8F83935}"/>
+                <a16:creationId xmlns:a16="http://schemas.microsoft.com/office/drawing/2014/main" id="{6250C798-0367-4852-8663-6621C02CBE56}"/>
               </a:ext>
             </a:extLst>
           </p:cNvPr>
@@ -4072,7 +4072,7 @@
           <p:cNvPr id="7" name="bullet-number-1">
             <a:extLst xmlns:a="http://schemas.openxmlformats.org/drawingml/2006/main">
               <a:ext uri="{FF2B5EF4-FFF2-40B4-BE49-F238E27FC236}">
-                <a16:creationId xmlns:a16="http://schemas.microsoft.com/office/drawing/2014/main" id="{D23A7CCB-68C2-4D8C-AE3C-F138CD14C137}"/>
+                <a16:creationId xmlns:a16="http://schemas.microsoft.com/office/drawing/2014/main" id="{124A6F07-59BC-40A9-A336-BB8DAF880033}"/>
               </a:ext>
             </a:extLst>
           </p:cNvPr>
@@ -4122,7 +4122,7 @@
           <p:cNvPr id="8" name="bullet-copy-1">
             <a:extLst xmlns:a="http://schemas.openxmlformats.org/drawingml/2006/main">
               <a:ext uri="{FF2B5EF4-FFF2-40B4-BE49-F238E27FC236}">
-                <a16:creationId xmlns:a16="http://schemas.microsoft.com/office/drawing/2014/main" id="{95526D2A-0340-416A-9BDA-683F7A4F50CE}"/>
+                <a16:creationId xmlns:a16="http://schemas.microsoft.com/office/drawing/2014/main" id="{531BE6BA-4199-4A2C-9D39-A6A1F8ECA3A1}"/>
               </a:ext>
             </a:extLst>
           </p:cNvPr>
@@ -4172,7 +4172,7 @@
           <p:cNvPr id="9" name="bullet-2">
             <a:extLst xmlns:a="http://schemas.openxmlformats.org/drawingml/2006/main">
               <a:ext uri="{FF2B5EF4-FFF2-40B4-BE49-F238E27FC236}">
-                <a16:creationId xmlns:a16="http://schemas.microsoft.com/office/drawing/2014/main" id="{C667A415-5F17-4108-835A-E047894098EE}"/>
+                <a16:creationId xmlns:a16="http://schemas.microsoft.com/office/drawing/2014/main" id="{4F2A532F-EF2A-4A46-ADDB-C4B772B4AFF4}"/>
               </a:ext>
             </a:extLst>
           </p:cNvPr>
@@ -4203,7 +4203,7 @@
           <p:cNvPr id="10" name="bullet-number-2">
             <a:extLst xmlns:a="http://schemas.openxmlformats.org/drawingml/2006/main">
               <a:ext uri="{FF2B5EF4-FFF2-40B4-BE49-F238E27FC236}">
-                <a16:creationId xmlns:a16="http://schemas.microsoft.com/office/drawing/2014/main" id="{B6A31F72-7584-4632-BC69-9756A6F8FF55}"/>
+                <a16:creationId xmlns:a16="http://schemas.microsoft.com/office/drawing/2014/main" id="{52133473-161B-4CA4-87DE-31E572C70679}"/>
               </a:ext>
             </a:extLst>
           </p:cNvPr>
@@ -4253,7 +4253,7 @@
           <p:cNvPr id="11" name="bullet-copy-2">
             <a:extLst xmlns:a="http://schemas.openxmlformats.org/drawingml/2006/main">
               <a:ext uri="{FF2B5EF4-FFF2-40B4-BE49-F238E27FC236}">
-                <a16:creationId xmlns:a16="http://schemas.microsoft.com/office/drawing/2014/main" id="{B863C6A2-3E9A-4FF5-A29C-8AC1D048CDC8}"/>
+                <a16:creationId xmlns:a16="http://schemas.microsoft.com/office/drawing/2014/main" id="{0CF7D879-F72E-4A3A-B55D-0ACEFC3C7BAD}"/>
               </a:ext>
             </a:extLst>
           </p:cNvPr>
@@ -4293,7 +4293,7 @@
                   <a:srgbClr val="16343A"/>
                 </a:solidFill>
               </a:rPr>
-              <a:t>Store them in a pin cushion or approved container.</a:t>
+              <a:t>Think in zones.</a:t>
             </a:r>
           </a:p>
         </p:txBody>
@@ -4303,7 +4303,7 @@
           <p:cNvPr id="12" name="bullet-3">
             <a:extLst xmlns:a="http://schemas.openxmlformats.org/drawingml/2006/main">
               <a:ext uri="{FF2B5EF4-FFF2-40B4-BE49-F238E27FC236}">
-                <a16:creationId xmlns:a16="http://schemas.microsoft.com/office/drawing/2014/main" id="{A585CA0F-018C-4420-917E-6573EB7917FF}"/>
+                <a16:creationId xmlns:a16="http://schemas.microsoft.com/office/drawing/2014/main" id="{05871421-B5AE-4420-8DFB-0A32A8AD6CCD}"/>
               </a:ext>
             </a:extLst>
           </p:cNvPr>
@@ -4334,7 +4334,7 @@
           <p:cNvPr id="13" name="bullet-number-3">
             <a:extLst xmlns:a="http://schemas.openxmlformats.org/drawingml/2006/main">
               <a:ext uri="{FF2B5EF4-FFF2-40B4-BE49-F238E27FC236}">
-                <a16:creationId xmlns:a16="http://schemas.microsoft.com/office/drawing/2014/main" id="{7FE42FA8-9789-4BB5-8953-4C15CE5DEA18}"/>
+                <a16:creationId xmlns:a16="http://schemas.microsoft.com/office/drawing/2014/main" id="{1E326746-9C10-43D1-B025-67763B97DB5F}"/>
               </a:ext>
             </a:extLst>
           </p:cNvPr>
@@ -4384,7 +4384,7 @@
           <p:cNvPr id="14" name="bullet-copy-3">
             <a:extLst xmlns:a="http://schemas.openxmlformats.org/drawingml/2006/main">
               <a:ext uri="{FF2B5EF4-FFF2-40B4-BE49-F238E27FC236}">
-                <a16:creationId xmlns:a16="http://schemas.microsoft.com/office/drawing/2014/main" id="{8B6B2688-23E4-4925-BAB1-89E0E649E273}"/>
+                <a16:creationId xmlns:a16="http://schemas.microsoft.com/office/drawing/2014/main" id="{74049A2D-78E3-4773-917C-1BB5B5937DC7}"/>
               </a:ext>
             </a:extLst>
           </p:cNvPr>
@@ -4424,7 +4424,7 @@
                   <a:srgbClr val="16343A"/>
                 </a:solidFill>
               </a:rPr>
-              <a:t>Carry scissors closed with the points down and use fabric scissors only for fabric.</a:t>
+              <a:t>It reduces reaching across hazards, makes missing pins easier to notice and creates space to rotate or support fabric without pulling it.</a:t>
             </a:r>
           </a:p>
         </p:txBody>
@@ -4432,7 +4432,7 @@
     </p:spTree>
     <p:extLst>
       <p:ext uri="{BB962C8B-B14F-4D97-AF65-F5344CB8AC3E}">
-        <p14:creationId xmlns:p14="http://schemas.microsoft.com/office/powerpoint/2010/main" val="1240345900"/>
+        <p14:creationId xmlns:p14="http://schemas.microsoft.com/office/powerpoint/2010/main" val="442721600"/>
       </p:ext>
     </p:extLst>
   </p:cSld>
@@ -4463,7 +4463,7 @@
           <p:cNvPr id="12" name="top-rule">
             <a:extLst xmlns:a="http://schemas.openxmlformats.org/drawingml/2006/main">
               <a:ext uri="{FF2B5EF4-FFF2-40B4-BE49-F238E27FC236}">
-                <a16:creationId xmlns:a16="http://schemas.microsoft.com/office/drawing/2014/main" id="{6EE2E811-A75A-4E00-8A8F-DA22385153B9}"/>
+                <a16:creationId xmlns:a16="http://schemas.microsoft.com/office/drawing/2014/main" id="{17855554-0782-4B5E-83DF-6AA04CACA255}"/>
               </a:ext>
             </a:extLst>
           </p:cNvPr>
@@ -4494,7 +4494,7 @@
           <p:cNvPr id="2" name="course-label">
             <a:extLst xmlns:a="http://schemas.openxmlformats.org/drawingml/2006/main">
               <a:ext uri="{FF2B5EF4-FFF2-40B4-BE49-F238E27FC236}">
-                <a16:creationId xmlns:a16="http://schemas.microsoft.com/office/drawing/2014/main" id="{0AF514D9-33CC-4C58-B87E-0EEF395E4423}"/>
+                <a16:creationId xmlns:a16="http://schemas.microsoft.com/office/drawing/2014/main" id="{90C7FDD5-82A5-4B04-BA4F-F7F89359E30C}"/>
               </a:ext>
             </a:extLst>
           </p:cNvPr>
@@ -4544,7 +4544,7 @@
           <p:cNvPr id="3" name="module-label">
             <a:extLst xmlns:a="http://schemas.openxmlformats.org/drawingml/2006/main">
               <a:ext uri="{FF2B5EF4-FFF2-40B4-BE49-F238E27FC236}">
-                <a16:creationId xmlns:a16="http://schemas.microsoft.com/office/drawing/2014/main" id="{174934CA-AE39-4AA9-9164-F08090C5318F}"/>
+                <a16:creationId xmlns:a16="http://schemas.microsoft.com/office/drawing/2014/main" id="{F688B542-D7E4-45AD-AD01-F2641B451966}"/>
               </a:ext>
             </a:extLst>
           </p:cNvPr>
@@ -4594,7 +4594,7 @@
           <p:cNvPr id="4" name="slide-title">
             <a:extLst xmlns:a="http://schemas.openxmlformats.org/drawingml/2006/main">
               <a:ext uri="{FF2B5EF4-FFF2-40B4-BE49-F238E27FC236}">
-                <a16:creationId xmlns:a16="http://schemas.microsoft.com/office/drawing/2014/main" id="{F0708347-DFEB-48FB-8440-C26317E27D22}"/>
+                <a16:creationId xmlns:a16="http://schemas.microsoft.com/office/drawing/2014/main" id="{A6DD62E7-5858-43BE-9AB8-E2893894CA10}"/>
               </a:ext>
             </a:extLst>
           </p:cNvPr>
@@ -4644,7 +4644,7 @@
           <p:cNvPr id="5" name="slide-subtitle">
             <a:extLst xmlns:a="http://schemas.openxmlformats.org/drawingml/2006/main">
               <a:ext uri="{FF2B5EF4-FFF2-40B4-BE49-F238E27FC236}">
-                <a16:creationId xmlns:a16="http://schemas.microsoft.com/office/drawing/2014/main" id="{5D7C71C8-1ADD-4999-B32B-AE73176F76C5}"/>
+                <a16:creationId xmlns:a16="http://schemas.microsoft.com/office/drawing/2014/main" id="{3DB8E6AB-693B-4202-8AEE-411589A46E4F}"/>
               </a:ext>
             </a:extLst>
           </p:cNvPr>
@@ -4694,7 +4694,7 @@
           <p:cNvPr id="6" name="prompt-accent">
             <a:extLst xmlns:a="http://schemas.openxmlformats.org/drawingml/2006/main">
               <a:ext uri="{FF2B5EF4-FFF2-40B4-BE49-F238E27FC236}">
-                <a16:creationId xmlns:a16="http://schemas.microsoft.com/office/drawing/2014/main" id="{67BCDFD9-B254-4F24-BC66-1CE8A5AD1551}"/>
+                <a16:creationId xmlns:a16="http://schemas.microsoft.com/office/drawing/2014/main" id="{A59C7961-70C5-448F-A933-4682EFD45B09}"/>
               </a:ext>
             </a:extLst>
           </p:cNvPr>
@@ -4725,7 +4725,7 @@
           <p:cNvPr id="7" name="plain-language">
             <a:extLst xmlns:a="http://schemas.openxmlformats.org/drawingml/2006/main">
               <a:ext uri="{FF2B5EF4-FFF2-40B4-BE49-F238E27FC236}">
-                <a16:creationId xmlns:a16="http://schemas.microsoft.com/office/drawing/2014/main" id="{DDB8C16A-547A-4940-B49A-F08BFE4AD91B}"/>
+                <a16:creationId xmlns:a16="http://schemas.microsoft.com/office/drawing/2014/main" id="{4F10F356-E1FC-4B72-B8F9-6B4C7A7C6325}"/>
               </a:ext>
             </a:extLst>
           </p:cNvPr>
@@ -4775,7 +4775,7 @@
           <p:cNvPr id="8" name="clarify">
             <a:extLst xmlns:a="http://schemas.openxmlformats.org/drawingml/2006/main">
               <a:ext uri="{FF2B5EF4-FFF2-40B4-BE49-F238E27FC236}">
-                <a16:creationId xmlns:a16="http://schemas.microsoft.com/office/drawing/2014/main" id="{A9A44B43-3BD2-4797-9160-C498A14ACB68}"/>
+                <a16:creationId xmlns:a16="http://schemas.microsoft.com/office/drawing/2014/main" id="{6269D6DD-6CE8-41DA-AE1F-73AE4C07716A}"/>
               </a:ext>
             </a:extLst>
           </p:cNvPr>
@@ -4825,7 +4825,7 @@
           <p:cNvPr id="9" name="starter-label">
             <a:extLst xmlns:a="http://schemas.openxmlformats.org/drawingml/2006/main">
               <a:ext uri="{FF2B5EF4-FFF2-40B4-BE49-F238E27FC236}">
-                <a16:creationId xmlns:a16="http://schemas.microsoft.com/office/drawing/2014/main" id="{4FD835A0-9FAA-4B08-A4C4-A14022135104}"/>
+                <a16:creationId xmlns:a16="http://schemas.microsoft.com/office/drawing/2014/main" id="{1EB4D283-AD05-4F62-8106-F0AFE27B7DEB}"/>
               </a:ext>
             </a:extLst>
           </p:cNvPr>
@@ -4875,7 +4875,7 @@
           <p:cNvPr id="10" name="starter">
             <a:extLst xmlns:a="http://schemas.openxmlformats.org/drawingml/2006/main">
               <a:ext uri="{FF2B5EF4-FFF2-40B4-BE49-F238E27FC236}">
-                <a16:creationId xmlns:a16="http://schemas.microsoft.com/office/drawing/2014/main" id="{A5114026-21CC-4C71-8D79-9675267311C7}"/>
+                <a16:creationId xmlns:a16="http://schemas.microsoft.com/office/drawing/2014/main" id="{250A552D-CAE3-419A-B15F-509135C3F257}"/>
               </a:ext>
             </a:extLst>
           </p:cNvPr>
@@ -4925,7 +4925,7 @@
           <p:cNvPr id="11" name="action">
             <a:extLst xmlns:a="http://schemas.openxmlformats.org/drawingml/2006/main">
               <a:ext uri="{FF2B5EF4-FFF2-40B4-BE49-F238E27FC236}">
-                <a16:creationId xmlns:a16="http://schemas.microsoft.com/office/drawing/2014/main" id="{594B33D3-D780-46DB-8AA1-E9A4F886BB0C}"/>
+                <a16:creationId xmlns:a16="http://schemas.microsoft.com/office/drawing/2014/main" id="{A71F49CA-CC7E-42AD-925A-CEDDC66E3065}"/>
               </a:ext>
             </a:extLst>
           </p:cNvPr>
@@ -4973,7 +4973,7 @@
     </p:spTree>
     <p:extLst>
       <p:ext uri="{BB962C8B-B14F-4D97-AF65-F5344CB8AC3E}">
-        <p14:creationId xmlns:p14="http://schemas.microsoft.com/office/powerpoint/2010/main" val="1069538160"/>
+        <p14:creationId xmlns:p14="http://schemas.microsoft.com/office/powerpoint/2010/main" val="1810612164"/>
       </p:ext>
     </p:extLst>
   </p:cSld>
@@ -5004,7 +5004,7 @@
           <p:cNvPr id="15" name="top-rule">
             <a:extLst xmlns:a="http://schemas.openxmlformats.org/drawingml/2006/main">
               <a:ext uri="{FF2B5EF4-FFF2-40B4-BE49-F238E27FC236}">
-                <a16:creationId xmlns:a16="http://schemas.microsoft.com/office/drawing/2014/main" id="{8427F3CC-8060-4BA7-BFE8-4C8E5F082CBF}"/>
+                <a16:creationId xmlns:a16="http://schemas.microsoft.com/office/drawing/2014/main" id="{87594BD2-8E05-4494-A989-9A4719AC1F98}"/>
               </a:ext>
             </a:extLst>
           </p:cNvPr>
@@ -5035,7 +5035,7 @@
           <p:cNvPr id="2" name="course-label">
             <a:extLst xmlns:a="http://schemas.openxmlformats.org/drawingml/2006/main">
               <a:ext uri="{FF2B5EF4-FFF2-40B4-BE49-F238E27FC236}">
-                <a16:creationId xmlns:a16="http://schemas.microsoft.com/office/drawing/2014/main" id="{FB19B222-BF25-45F9-AD89-DF688F3AF0E1}"/>
+                <a16:creationId xmlns:a16="http://schemas.microsoft.com/office/drawing/2014/main" id="{BD394441-0C2A-4854-93BA-35669F41100E}"/>
               </a:ext>
             </a:extLst>
           </p:cNvPr>
@@ -5085,7 +5085,7 @@
           <p:cNvPr id="3" name="module-label">
             <a:extLst xmlns:a="http://schemas.openxmlformats.org/drawingml/2006/main">
               <a:ext uri="{FF2B5EF4-FFF2-40B4-BE49-F238E27FC236}">
-                <a16:creationId xmlns:a16="http://schemas.microsoft.com/office/drawing/2014/main" id="{FC4BF69A-0CE9-468E-865B-9351EB20E5F8}"/>
+                <a16:creationId xmlns:a16="http://schemas.microsoft.com/office/drawing/2014/main" id="{896E40CE-3920-493D-A47E-26A6455E7C4C}"/>
               </a:ext>
             </a:extLst>
           </p:cNvPr>
@@ -5135,7 +5135,7 @@
           <p:cNvPr id="4" name="slide-title">
             <a:extLst xmlns:a="http://schemas.openxmlformats.org/drawingml/2006/main">
               <a:ext uri="{FF2B5EF4-FFF2-40B4-BE49-F238E27FC236}">
-                <a16:creationId xmlns:a16="http://schemas.microsoft.com/office/drawing/2014/main" id="{71731C04-FDB0-4CEB-A70C-3CA9D3063F97}"/>
+                <a16:creationId xmlns:a16="http://schemas.microsoft.com/office/drawing/2014/main" id="{F318D5F5-FE63-4706-BC98-09C697999069}"/>
               </a:ext>
             </a:extLst>
           </p:cNvPr>
@@ -5185,7 +5185,7 @@
           <p:cNvPr id="5" name="slide-subtitle">
             <a:extLst xmlns:a="http://schemas.openxmlformats.org/drawingml/2006/main">
               <a:ext uri="{FF2B5EF4-FFF2-40B4-BE49-F238E27FC236}">
-                <a16:creationId xmlns:a16="http://schemas.microsoft.com/office/drawing/2014/main" id="{EDBE0687-DA01-4A86-8551-CF230787D5CD}"/>
+                <a16:creationId xmlns:a16="http://schemas.microsoft.com/office/drawing/2014/main" id="{D1679CE8-DFAC-42F4-BD50-C5731391CDA5}"/>
               </a:ext>
             </a:extLst>
           </p:cNvPr>
@@ -5235,7 +5235,7 @@
           <p:cNvPr id="6" name="bullet-1">
             <a:extLst xmlns:a="http://schemas.openxmlformats.org/drawingml/2006/main">
               <a:ext uri="{FF2B5EF4-FFF2-40B4-BE49-F238E27FC236}">
-                <a16:creationId xmlns:a16="http://schemas.microsoft.com/office/drawing/2014/main" id="{82F51532-6A7F-4ED7-9E7B-32F0180711DB}"/>
+                <a16:creationId xmlns:a16="http://schemas.microsoft.com/office/drawing/2014/main" id="{782F5772-DA76-4E88-B498-0A00EAEF8FC3}"/>
               </a:ext>
             </a:extLst>
           </p:cNvPr>
@@ -5266,7 +5266,7 @@
           <p:cNvPr id="7" name="bullet-number-1">
             <a:extLst xmlns:a="http://schemas.openxmlformats.org/drawingml/2006/main">
               <a:ext uri="{FF2B5EF4-FFF2-40B4-BE49-F238E27FC236}">
-                <a16:creationId xmlns:a16="http://schemas.microsoft.com/office/drawing/2014/main" id="{9DDD59E3-1FB7-44D6-B82E-8D4B9EFCB115}"/>
+                <a16:creationId xmlns:a16="http://schemas.microsoft.com/office/drawing/2014/main" id="{56F735C3-1662-423D-B094-D7FF65E3F8AE}"/>
               </a:ext>
             </a:extLst>
           </p:cNvPr>
@@ -5316,7 +5316,7 @@
           <p:cNvPr id="8" name="bullet-copy-1">
             <a:extLst xmlns:a="http://schemas.openxmlformats.org/drawingml/2006/main">
               <a:ext uri="{FF2B5EF4-FFF2-40B4-BE49-F238E27FC236}">
-                <a16:creationId xmlns:a16="http://schemas.microsoft.com/office/drawing/2014/main" id="{341BA9DE-2BDB-4D69-BD02-D06B464B8971}"/>
+                <a16:creationId xmlns:a16="http://schemas.microsoft.com/office/drawing/2014/main" id="{1558D510-E787-492D-A46A-8F4F7CD5E6F6}"/>
               </a:ext>
             </a:extLst>
           </p:cNvPr>
@@ -5366,7 +5366,7 @@
           <p:cNvPr id="9" name="bullet-2">
             <a:extLst xmlns:a="http://schemas.openxmlformats.org/drawingml/2006/main">
               <a:ext uri="{FF2B5EF4-FFF2-40B4-BE49-F238E27FC236}">
-                <a16:creationId xmlns:a16="http://schemas.microsoft.com/office/drawing/2014/main" id="{0C9430D6-5132-4734-93B3-17545D85493B}"/>
+                <a16:creationId xmlns:a16="http://schemas.microsoft.com/office/drawing/2014/main" id="{14C2EBC8-1CFA-4993-A627-6F51B4841E23}"/>
               </a:ext>
             </a:extLst>
           </p:cNvPr>
@@ -5397,7 +5397,7 @@
           <p:cNvPr id="10" name="bullet-number-2">
             <a:extLst xmlns:a="http://schemas.openxmlformats.org/drawingml/2006/main">
               <a:ext uri="{FF2B5EF4-FFF2-40B4-BE49-F238E27FC236}">
-                <a16:creationId xmlns:a16="http://schemas.microsoft.com/office/drawing/2014/main" id="{AE632DC9-EE16-487E-BFB6-4E574F5EE698}"/>
+                <a16:creationId xmlns:a16="http://schemas.microsoft.com/office/drawing/2014/main" id="{D6DFA190-16C8-4BCB-B0DB-35A2696021F3}"/>
               </a:ext>
             </a:extLst>
           </p:cNvPr>
@@ -5447,7 +5447,7 @@
           <p:cNvPr id="11" name="bullet-copy-2">
             <a:extLst xmlns:a="http://schemas.openxmlformats.org/drawingml/2006/main">
               <a:ext uri="{FF2B5EF4-FFF2-40B4-BE49-F238E27FC236}">
-                <a16:creationId xmlns:a16="http://schemas.microsoft.com/office/drawing/2014/main" id="{08CBD54E-E712-4B80-B81E-29008FF6A5C4}"/>
+                <a16:creationId xmlns:a16="http://schemas.microsoft.com/office/drawing/2014/main" id="{644B6E35-21A0-4F6B-B8D4-894F9AD5D85A}"/>
               </a:ext>
             </a:extLst>
           </p:cNvPr>
@@ -5487,7 +5487,7 @@
                   <a:srgbClr val="16343A"/>
                 </a:solidFill>
               </a:rPr>
-              <a:t>It also identifies sewing equipment such as the sewing machine, thread, bobbin, bobbin case, pins, pin cushion, tape measure, hand needle, scissors, ironing equipment…</a:t>
+              <a:t>A useful equipment record links each item to a task.</a:t>
             </a:r>
           </a:p>
         </p:txBody>
@@ -5497,7 +5497,7 @@
           <p:cNvPr id="12" name="bullet-3">
             <a:extLst xmlns:a="http://schemas.openxmlformats.org/drawingml/2006/main">
               <a:ext uri="{FF2B5EF4-FFF2-40B4-BE49-F238E27FC236}">
-                <a16:creationId xmlns:a16="http://schemas.microsoft.com/office/drawing/2014/main" id="{EA95AE47-A34F-4CEB-B2E6-B64D25F5E597}"/>
+                <a16:creationId xmlns:a16="http://schemas.microsoft.com/office/drawing/2014/main" id="{84B75A4F-B0F7-448F-9252-2DE279EA5FF0}"/>
               </a:ext>
             </a:extLst>
           </p:cNvPr>
@@ -5528,7 +5528,7 @@
           <p:cNvPr id="13" name="bullet-number-3">
             <a:extLst xmlns:a="http://schemas.openxmlformats.org/drawingml/2006/main">
               <a:ext uri="{FF2B5EF4-FFF2-40B4-BE49-F238E27FC236}">
-                <a16:creationId xmlns:a16="http://schemas.microsoft.com/office/drawing/2014/main" id="{59A282BC-AF5F-4C20-A47C-C9BF6E49DB9F}"/>
+                <a16:creationId xmlns:a16="http://schemas.microsoft.com/office/drawing/2014/main" id="{E3331CC2-91AF-4EF6-BE3F-AB4D0BB94811}"/>
               </a:ext>
             </a:extLst>
           </p:cNvPr>
@@ -5578,7 +5578,7 @@
           <p:cNvPr id="14" name="bullet-copy-3">
             <a:extLst xmlns:a="http://schemas.openxmlformats.org/drawingml/2006/main">
               <a:ext uri="{FF2B5EF4-FFF2-40B4-BE49-F238E27FC236}">
-                <a16:creationId xmlns:a16="http://schemas.microsoft.com/office/drawing/2014/main" id="{145D93E4-4559-468D-A0B4-156FB50FF785}"/>
+                <a16:creationId xmlns:a16="http://schemas.microsoft.com/office/drawing/2014/main" id="{84A61A15-AA8F-4D9C-A3F1-DD4B33C5C242}"/>
               </a:ext>
             </a:extLst>
           </p:cNvPr>
@@ -5618,7 +5618,7 @@
                   <a:srgbClr val="16343A"/>
                 </a:solidFill>
               </a:rPr>
-              <a:t>Your final material list should name only items actually used and include clear, labelled photographs or drawings.</a:t>
+              <a:t>Photographs should show the actual classroom item at a readable scale, with a caption that names what the viewer should notice.</a:t>
             </a:r>
           </a:p>
         </p:txBody>
@@ -5626,7 +5626,7 @@
     </p:spTree>
     <p:extLst>
       <p:ext uri="{BB962C8B-B14F-4D97-AF65-F5344CB8AC3E}">
-        <p14:creationId xmlns:p14="http://schemas.microsoft.com/office/powerpoint/2010/main" val="1787665720"/>
+        <p14:creationId xmlns:p14="http://schemas.microsoft.com/office/powerpoint/2010/main" val="56068837"/>
       </p:ext>
     </p:extLst>
   </p:cSld>
@@ -5657,7 +5657,7 @@
           <p:cNvPr id="6" name="closing-rule">
             <a:extLst xmlns:a="http://schemas.openxmlformats.org/drawingml/2006/main">
               <a:ext uri="{FF2B5EF4-FFF2-40B4-BE49-F238E27FC236}">
-                <a16:creationId xmlns:a16="http://schemas.microsoft.com/office/drawing/2014/main" id="{ADCE8C36-CE63-4552-AC83-1646E4999BFB}"/>
+                <a16:creationId xmlns:a16="http://schemas.microsoft.com/office/drawing/2014/main" id="{B82629E2-0570-443E-8E8F-46E930F4C53B}"/>
               </a:ext>
             </a:extLst>
           </p:cNvPr>
@@ -5688,7 +5688,7 @@
           <p:cNvPr id="2" name="closing-kicker">
             <a:extLst xmlns:a="http://schemas.openxmlformats.org/drawingml/2006/main">
               <a:ext uri="{FF2B5EF4-FFF2-40B4-BE49-F238E27FC236}">
-                <a16:creationId xmlns:a16="http://schemas.microsoft.com/office/drawing/2014/main" id="{C0A33CD6-3D5F-480C-8E0E-EE63B3862AAE}"/>
+                <a16:creationId xmlns:a16="http://schemas.microsoft.com/office/drawing/2014/main" id="{BE538211-FC8B-4D26-B9D1-8BBE57EE7522}"/>
               </a:ext>
             </a:extLst>
           </p:cNvPr>
@@ -5738,7 +5738,7 @@
           <p:cNvPr id="3" name="closing-title">
             <a:extLst xmlns:a="http://schemas.openxmlformats.org/drawingml/2006/main">
               <a:ext uri="{FF2B5EF4-FFF2-40B4-BE49-F238E27FC236}">
-                <a16:creationId xmlns:a16="http://schemas.microsoft.com/office/drawing/2014/main" id="{3A490994-13C2-4EAA-9255-7BA62A3D52FB}"/>
+                <a16:creationId xmlns:a16="http://schemas.microsoft.com/office/drawing/2014/main" id="{6346FD9E-0B19-44B3-901F-8EB1D68639DF}"/>
               </a:ext>
             </a:extLst>
           </p:cNvPr>
@@ -5788,7 +5788,7 @@
           <p:cNvPr id="4" name="closing-copy">
             <a:extLst xmlns:a="http://schemas.openxmlformats.org/drawingml/2006/main">
               <a:ext uri="{FF2B5EF4-FFF2-40B4-BE49-F238E27FC236}">
-                <a16:creationId xmlns:a16="http://schemas.microsoft.com/office/drawing/2014/main" id="{0829E859-D14C-4656-A617-7AB4FF95252C}"/>
+                <a16:creationId xmlns:a16="http://schemas.microsoft.com/office/drawing/2014/main" id="{87BCD4B5-C8A9-4651-A217-3397CFF653F4}"/>
               </a:ext>
             </a:extLst>
           </p:cNvPr>
@@ -5862,7 +5862,7 @@
                   <a:srgbClr val="E6F2EF"/>
                 </a:solidFill>
               </a:rPr>
-              <a:t>3. Continue Project Activity 4 and keep authentic evidence.</a:t>
+              <a:t>3. Continue the Safety scenario studio and keep authentic evidence.</a:t>
             </a:r>
           </a:p>
         </p:txBody>
@@ -5872,7 +5872,7 @@
           <p:cNvPr id="5" name="closing-boundary">
             <a:extLst xmlns:a="http://schemas.openxmlformats.org/drawingml/2006/main">
               <a:ext uri="{FF2B5EF4-FFF2-40B4-BE49-F238E27FC236}">
-                <a16:creationId xmlns:a16="http://schemas.microsoft.com/office/drawing/2014/main" id="{B2AA4367-072B-4794-A5A4-CF86084063E5}"/>
+                <a16:creationId xmlns:a16="http://schemas.microsoft.com/office/drawing/2014/main" id="{53936FD2-74C5-4187-9905-914F530250ED}"/>
               </a:ext>
             </a:extLst>
           </p:cNvPr>
@@ -5920,7 +5920,7 @@
     </p:spTree>
     <p:extLst>
       <p:ext uri="{BB962C8B-B14F-4D97-AF65-F5344CB8AC3E}">
-        <p14:creationId xmlns:p14="http://schemas.microsoft.com/office/powerpoint/2010/main" val="609593570"/>
+        <p14:creationId xmlns:p14="http://schemas.microsoft.com/office/powerpoint/2010/main" val="846065333"/>
       </p:ext>
     </p:extLst>
   </p:cSld>
